--- a/3-Master_Plan/re_entry/HEROs_and_PASSes/slides/auto/CHAR_PD22_raw_roster_size_distribution_before_qc_AUTO.pptx
+++ b/3-Master_Plan/re_entry/HEROs_and_PASSes/slides/auto/CHAR_PD22_raw_roster_size_distribution_before_qc_AUTO.pptx
@@ -3145,7 +3145,7 @@
               <a:rPr sz="1000" b="0" i="0" baseline="0">
                 <a:latin typeface="Calibri"/>
               </a:rPr>
-              <a:t>PD22 · roster size (before QC) · 2011-2021 · raw median = 15 · max = 115</a:t>
+              <a:t>PD22 · roster size (before QC) · 2011-2021 · raw median = $15$ · max = $115$</a:t>
             </a:r>
           </a:p>
         </p:txBody>
@@ -3252,7 +3252,7 @@
               <a:rPr sz="1000" b="0" i="0" baseline="0">
                 <a:latin typeface="Calibri"/>
               </a:rPr>
-              <a:t>  Panel: 2011-2021 MBB · 6,557 team-seasons · 104,790 player-season rows.</a:t>
+              <a:t>  Panel: 2011-2021 MBB · $6,557$ team-seasons · $104,790$ player-season rows.</a:t>
             </a:r>
           </a:p>
           <a:p>
@@ -3272,7 +3272,7 @@
               <a:rPr sz="1000" b="0" i="0" baseline="0">
                 <a:latin typeface="Calibri"/>
               </a:rPr>
-              <a:t>  Min=0 raw box (blue): median = 15, mean = 16.0; 16.3\% exactly 15, 64.5\% $\geq$ 15, 48.1\% $&gt;$ 15.</a:t>
+              <a:t>  Min=$0$ raw box (blue): median = $15$, mean = $16.0$; $16.3\%$ exactly $15$, $64.5\%$ $\geq 15$, $48.1\%$ $&gt; 15$.</a:t>
             </a:r>
           </a:p>
           <a:p>
@@ -3292,7 +3292,7 @@
               <a:rPr sz="1000" b="0" i="0" baseline="0">
                 <a:latin typeface="Calibri"/>
               </a:rPr>
-              <a:t>  Min-20 drop (orange): median = 11, mean = 9.5; only 2.3\% exactly 15.</a:t>
+              <a:t>  Min-20 drop (orange): median = $11$, mean = $9.5$; only $2.3\%$ exactly $15$.</a:t>
             </a:r>
           </a:p>
           <a:p>
@@ -3312,7 +3312,7 @@
               <a:rPr sz="1000" b="0" i="0" baseline="0">
                 <a:latin typeface="Calibri"/>
               </a:rPr>
-              <a:t>  Tail: max = 115 (BYU 2018); 115 BYU spike from ESPN dash rows in one game (SCOUT Aug 2026).</a:t>
+              <a:t>  Tail: max = $115$ (BYU $2,018$); $115$ BYU spike from ESPN dash rows in one game (SCOUT Aug $2,026$).</a:t>
             </a:r>
           </a:p>
           <a:p>
